--- a/Agentes Hallazgos/mujer-v3-deck-flat.pptx
+++ b/Agentes Hallazgos/mujer-v3-deck-flat.pptx
@@ -3925,7 +3925,7 @@
                 </a:solidFill>
                 <a:latin typeface="Instrument Serif"/>
               </a:rPr>
-              <a:t>48.5% DE LAS MUJERES NO HACE NADA POR SU SALUD MENTAL NI FÍSICA. </a:t>
+              <a:t>48.5% DE LAS MUJERES RESPONDE QUE NO HACE NADA POR SU SALUD. </a:t>
             </a:r>
             <a:r>
               <a:rPr sz="5000" b="0" i="1" kern="0" spc="0">
@@ -3934,7 +3934,7 @@
                 </a:solidFill>
                 <a:latin typeface="Instrument Serif"/>
               </a:rPr>
-              <a:t>EL HOMBRE SE EJERCITA. ELLA NO TIENE ESPACIO NI PARA ESO.</a:t>
+              <a:t>EN EL CUALI EL AUTOCUIDADO EXISTE — PERO QUEDA PARA ÚLTIMO, DESPUÉS DE LOS HIJOS Y LA CASA.</a:t>
             </a:r>
           </a:p>
         </p:txBody>
@@ -4108,7 +4108,7 @@
                 </a:solidFill>
                 <a:latin typeface="Poppins"/>
               </a:rPr>
-              <a:t> responde "No realizo ninguna actividad para cuidar mi salud mental y física" — frente al masculino cuya respuesta top es "Me ejercito" (43.1%).</a:t>
+              <a:t> responde "No realizo ninguna actividad" — frente al masculino cuya respuesta top es "Me ejercito" (43.1%).</a:t>
             </a:r>
           </a:p>
         </p:txBody>
@@ -4143,7 +4143,7 @@
                 </a:solidFill>
                 <a:latin typeface="Instrument Serif"/>
               </a:rPr>
-              <a:t>43%</a:t>
+              <a:t>60%</a:t>
             </a:r>
           </a:p>
         </p:txBody>
@@ -4178,7 +4178,7 @@
                 </a:solidFill>
                 <a:latin typeface="Poppins"/>
               </a:rPr>
-              <a:t>del </a:t>
+              <a:t>de las mujeres </a:t>
             </a:r>
             <a:r>
               <a:rPr sz="1300" b="1" i="0" kern="0" spc="0">
@@ -4187,7 +4187,7 @@
                 </a:solidFill>
                 <a:latin typeface="Poppins"/>
               </a:rPr>
-              <a:t>total</a:t>
+              <a:t>18-24 años</a:t>
             </a:r>
             <a:r>
               <a:rPr sz="1300" b="0" i="0" kern="0" spc="0">
@@ -4196,7 +4196,7 @@
                 </a:solidFill>
                 <a:latin typeface="Poppins"/>
               </a:rPr>
-              <a:t> no hace ninguna actividad de autocuidado; solo 3.0% va a terapia.</a:t>
+              <a:t> no realiza ninguna actividad declarada de autocuidado. El abandono es mayor entre las más jóvenes.</a:t>
             </a:r>
           </a:p>
         </p:txBody>
@@ -4231,7 +4231,7 @@
                 </a:solidFill>
                 <a:latin typeface="Instrument Serif"/>
               </a:rPr>
-              <a:t>60%</a:t>
+              <a:t>"Nada"</a:t>
             </a:r>
           </a:p>
         </p:txBody>
@@ -4266,7 +4266,7 @@
                 </a:solidFill>
                 <a:latin typeface="Poppins"/>
               </a:rPr>
-              <a:t>de las mujeres </a:t>
+              <a:t>es </a:t>
             </a:r>
             <a:r>
               <a:rPr sz="1300" b="1" i="0" kern="0" spc="0">
@@ -4275,7 +4275,7 @@
                 </a:solidFill>
                 <a:latin typeface="Poppins"/>
               </a:rPr>
-              <a:t>18-24 años</a:t>
+              <a:t>categoría declarada</a:t>
             </a:r>
             <a:r>
               <a:rPr sz="1300" b="0" i="0" kern="0" spc="0">
@@ -4284,7 +4284,7 @@
                 </a:solidFill>
                 <a:latin typeface="Poppins"/>
               </a:rPr>
-              <a:t> no realiza ninguna actividad de autocuidado. El abandono es mayor en las más jóvenes.</a:t>
+              <a:t>, no práctica real. En cuali aparecen actos mínimos: "cogerlo al paso", "comer a mi hora", "estudiar para drenar". Lo que falta es el permiso de llamarlo cuidado propio.</a:t>
             </a:r>
           </a:p>
         </p:txBody>
@@ -4415,7 +4415,7 @@
                 </a:solidFill>
                 <a:latin typeface="Instrument Serif"/>
               </a:rPr>
-              <a:t>«Ese tema de que dependa de mí 24-7 lo que se vaya a hacer te da un poco de estrés.»</a:t>
+              <a:t>«Aunque mis hijos se lleven el 100%, uno siempre se queda como más rezagado y se deja para último. La comida saludable de ellos no la hago necesariamente para mí.»</a:t>
             </a:r>
           </a:p>
         </p:txBody>
@@ -6672,7 +6672,7 @@
                 </a:solidFill>
                 <a:latin typeface="Instrument Serif"/>
               </a:rPr>
-              <a:t>SOLO EL HOMBRE DISTRIBUYE LA CARGA — ELLA YA LA TIENE ASIGNADA.</a:t>
+              <a:t>LO QUE RECIBIÓ DE SU MAMÁ LO ESTÁ PASANDO A SU HIJA: ORGANIZAR TODO Y GANARSE LO QUE SE GASTA.</a:t>
             </a:r>
           </a:p>
         </p:txBody>
@@ -6793,7 +6793,7 @@
                 </a:solidFill>
                 <a:latin typeface="Instrument Serif"/>
               </a:rPr>
-              <a:t>42%</a:t>
+              <a:t>49.5%</a:t>
             </a:r>
           </a:p>
         </p:txBody>
@@ -6828,7 +6828,7 @@
                 </a:solidFill>
                 <a:latin typeface="Poppins"/>
               </a:rPr>
-              <a:t>del total cree que la mayor responsabilidad de la crianza recae en la </a:t>
+              <a:t>del subset </a:t>
             </a:r>
             <a:r>
               <a:rPr sz="1300" b="1" i="0" kern="0" spc="0">
@@ -6837,7 +6837,7 @@
                 </a:solidFill>
                 <a:latin typeface="Poppins"/>
               </a:rPr>
-              <a:t>madre</a:t>
+              <a:t>femenino</a:t>
             </a:r>
             <a:r>
               <a:rPr sz="1300" b="0" i="0" kern="0" spc="0">
@@ -6846,7 +6846,7 @@
                 </a:solidFill>
                 <a:latin typeface="Poppins"/>
               </a:rPr>
-              <a:t>; 41.2% dice "ambos padres" y solo 15.8% señala al padre.</a:t>
+              <a:t> responde "Madre" como principal responsable. El masculino responde "Ambos padres" (45.6%).</a:t>
             </a:r>
           </a:p>
         </p:txBody>
@@ -6881,7 +6881,7 @@
                 </a:solidFill>
                 <a:latin typeface="Instrument Serif"/>
               </a:rPr>
-              <a:t>49.5%</a:t>
+              <a:t>57%</a:t>
             </a:r>
           </a:p>
         </p:txBody>
@@ -6916,7 +6916,7 @@
                 </a:solidFill>
                 <a:latin typeface="Poppins"/>
               </a:rPr>
-              <a:t>del subset </a:t>
+              <a:t>de los hogares </a:t>
             </a:r>
             <a:r>
               <a:rPr sz="1300" b="1" i="0" kern="0" spc="0">
@@ -6925,7 +6925,7 @@
                 </a:solidFill>
                 <a:latin typeface="Poppins"/>
               </a:rPr>
-              <a:t>femenino</a:t>
+              <a:t>monoparentales</a:t>
             </a:r>
             <a:r>
               <a:rPr sz="1300" b="0" i="0" kern="0" spc="0">
@@ -6934,7 +6934,7 @@
                 </a:solidFill>
                 <a:latin typeface="Poppins"/>
               </a:rPr>
-              <a:t> responde "Madre" como principal responsable, frente a 45.6% del masculino que responde "Ambos padres".</a:t>
+              <a:t> y 59.4% del estrato E responden "Madre". La carga se concentra donde no hay con quién repartirla.</a:t>
             </a:r>
           </a:p>
         </p:txBody>
@@ -6969,7 +6969,7 @@
                 </a:solidFill>
                 <a:latin typeface="Instrument Serif"/>
               </a:rPr>
-              <a:t>57%</a:t>
+              <a:t>60%</a:t>
             </a:r>
           </a:p>
         </p:txBody>
@@ -7004,7 +7004,7 @@
                 </a:solidFill>
                 <a:latin typeface="Poppins"/>
               </a:rPr>
-              <a:t>de los hogares </a:t>
+              <a:t>de las mujeres FW aprendió finanzas </a:t>
             </a:r>
             <a:r>
               <a:rPr sz="1300" b="1" i="0" kern="0" spc="0">
@@ -7013,7 +7013,7 @@
                 </a:solidFill>
                 <a:latin typeface="Poppins"/>
               </a:rPr>
-              <a:t>monoparentales</a:t>
+              <a:t>por su cuenta</a:t>
             </a:r>
             <a:r>
               <a:rPr sz="1300" b="0" i="0" kern="0" spc="0">
@@ -7022,7 +7022,7 @@
                 </a:solidFill>
                 <a:latin typeface="Poppins"/>
               </a:rPr>
-              <a:t> y 59.4% del estrato E responden "Madre". La carga se concentra donde no hay con quién repartirla.</a:t>
+              <a:t>. La línea de transmisión es femenina: la madre enseña a la hija a administrar — y la responsabilidad se hereda con el conocimiento.</a:t>
             </a:r>
           </a:p>
         </p:txBody>
@@ -7284,7 +7284,7 @@
                 </a:solidFill>
                 <a:latin typeface="Instrument Serif"/>
               </a:rPr>
-              <a:t>74.2% TIENE PRESUPUESTO, 74.1% PLANIFICA SIEMPRE O CASI SIEMPRE, 78.7% REVISA SUS CUENTAS CADA SEMANA O CADA DÍA. </a:t>
+              <a:t>74% TIENE PRESUPUESTO Y 79% REVISA SUS CUENTAS CADA SEMANA O CADA DÍA. </a:t>
             </a:r>
             <a:r>
               <a:rPr sz="5000" b="0" i="1" kern="0" spc="0">
@@ -7293,7 +7293,7 @@
                 </a:solidFill>
                 <a:latin typeface="Instrument Serif"/>
               </a:rPr>
-              <a:t>LA ADMINISTRADORA ES LA NORMA, NO LA EXCEPCIÓN.</a:t>
+              <a:t>LA ADMINISTRADORA EJEMPLAR PLANIFICA TODO — Y AUN ASÍ, EL 50% NO LOGRA AHORRAR (VER HALLAZGO SIGUIENTE).</a:t>
             </a:r>
           </a:p>
         </p:txBody>
@@ -8534,7 +8534,7 @@
                 </a:solidFill>
                 <a:latin typeface="Instrument Serif"/>
               </a:rPr>
-              <a:t>LA EMOCIÓN QUE MÁS SIENTE LA MUJER AL PENSAR EN SU DINERO ES ESTRÉS (44.3%). </a:t>
+              <a:t>SOLO 5.5% SIENTE ORGULLO CUANDO PIENSA EN SU DINERO. </a:t>
             </a:r>
             <a:r>
               <a:rPr sz="5000" b="0" i="1" kern="0" spc="0">
@@ -8543,7 +8543,7 @@
                 </a:solidFill>
                 <a:latin typeface="Instrument Serif"/>
               </a:rPr>
-              <a:t>EL ORGULLO SOLO LLEGA AL 5.5%: EL DINERO SE VIVE COMO AMENAZA, NO COMO LOGRO.</a:t>
+              <a:t>EN EL CUALI EL ORGULLO APARECE — PERO POR INDEPENDIZARSE, NO POR LO QUE TIENE EN LA CUENTA.</a:t>
             </a:r>
           </a:p>
         </p:txBody>
@@ -8717,7 +8717,7 @@
                 </a:solidFill>
                 <a:latin typeface="Poppins"/>
               </a:rPr>
-              <a:t>" como la emoción que más siente al pensar en sus finanzas; "Tranquilidad" 29.8%, "Miedo" 12.3%, "Culpa" 8.1%, "Orgullo" apenas 5.5%.</a:t>
+              <a:t>" como la emoción principal al pensar en sus finanzas; "Tranquilidad" 29.8%, "Miedo" 12.3%, "Orgullo" apenas 5.5%.</a:t>
             </a:r>
           </a:p>
         </p:txBody>
@@ -8752,7 +8752,7 @@
                 </a:solidFill>
                 <a:latin typeface="Instrument Serif"/>
               </a:rPr>
-              <a:t>41%</a:t>
+              <a:t>22%</a:t>
             </a:r>
           </a:p>
         </p:txBody>
@@ -8787,7 +8787,7 @@
                 </a:solidFill>
                 <a:latin typeface="Poppins"/>
               </a:rPr>
-              <a:t>siente </a:t>
+              <a:t>está satisfecha con su </a:t>
             </a:r>
             <a:r>
               <a:rPr sz="1300" b="1" i="0" kern="0" spc="0">
@@ -8796,7 +8796,7 @@
                 </a:solidFill>
                 <a:latin typeface="Poppins"/>
               </a:rPr>
-              <a:t>ansiedad o estrés financiero</a:t>
+              <a:t>situación financiera actual</a:t>
             </a:r>
             <a:r>
               <a:rPr sz="1300" b="0" i="0" kern="0" spc="0">
@@ -8805,7 +8805,7 @@
                 </a:solidFill>
                 <a:latin typeface="Poppins"/>
               </a:rPr>
-              <a:t> con frecuencia (top-2, 4+5); el promedio en escala 1-5 es 3.48.</a:t>
+              <a:t> (top-2); 30.8% insatisfecha. Promedio 2.75 sobre 5.</a:t>
             </a:r>
           </a:p>
         </p:txBody>
@@ -8840,7 +8840,7 @@
                 </a:solidFill>
                 <a:latin typeface="Instrument Serif"/>
               </a:rPr>
-              <a:t>22%</a:t>
+              <a:t>"Logro"</a:t>
             </a:r>
           </a:p>
         </p:txBody>
@@ -8875,7 +8875,7 @@
                 </a:solidFill>
                 <a:latin typeface="Poppins"/>
               </a:rPr>
-              <a:t>está satisfecha con su </a:t>
+              <a:t>como categoría financiera </a:t>
             </a:r>
             <a:r>
               <a:rPr sz="1300" b="1" i="0" kern="0" spc="0">
@@ -8884,7 +8884,7 @@
                 </a:solidFill>
                 <a:latin typeface="Poppins"/>
               </a:rPr>
-              <a:t>situación financiera actual</a:t>
+              <a:t>no aparece en cuali</a:t>
             </a:r>
             <a:r>
               <a:rPr sz="1300" b="0" i="0" kern="0" spc="0">
@@ -8893,7 +8893,7 @@
                 </a:solidFill>
                 <a:latin typeface="Poppins"/>
               </a:rPr>
-              <a:t> (top-2 22.5%); 30.8% insatisfecha (bottom-2). Promedio 2.75 sobre 5.</a:t>
+              <a:t>. Lo que sí aparece: "salir adelante", "mudarme sola", "no deberle a nadie". El orgullo dominicano femenino es de resistencia validada — no de capital acumulado.</a:t>
             </a:r>
           </a:p>
         </p:txBody>
@@ -9024,7 +9024,7 @@
                 </a:solidFill>
                 <a:latin typeface="Instrument Serif"/>
               </a:rPr>
-              <a:t>«Tengo miedo a no ser lo que yo espero ser, o a que las cosas no se den como yo quiero. Siento que el tiempo está pasando muy rápido, que no tengo una casa mía o no tengo un auto propio.»</a:t>
+              <a:t>«Me siento orgullosa de haberme mudado sola. Lo fuerte que yo he sido, lo lejos que yo he llegado, lo organizada que está mi vida.»</a:t>
             </a:r>
           </a:p>
         </p:txBody>
@@ -9776,7 +9776,7 @@
                 </a:solidFill>
                 <a:latin typeface="Instrument Serif"/>
               </a:rPr>
-              <a:t>50% NO LOGRA AHORRAR CON FACILIDAD. LA ESTRATEGIA QUE MÁS FUNCIONA: </a:t>
+              <a:t>50% NO LOGRA AHORRAR CON FACILIDAD. </a:t>
             </a:r>
             <a:r>
               <a:rPr sz="5000" b="0" i="1" kern="0" spc="0">
@@ -9785,7 +9785,7 @@
                 </a:solidFill>
                 <a:latin typeface="Instrument Serif"/>
               </a:rPr>
-              <a:t>ESCONDERSE EL DINERO DE SÍ MISMAS ANTES DE QUE LLEGUE A LA CUENTA.</a:t>
+              <a:t>EL 74% PLANIFICA Y REVISA CUENTAS — LA ADMINISTRADORA EJEMPLAR NO SE ESTÁ OLVIDANDO: NO LE QUEDA NADA.</a:t>
             </a:r>
           </a:p>
         </p:txBody>
@@ -10266,7 +10266,7 @@
                 </a:solidFill>
                 <a:latin typeface="Instrument Serif"/>
               </a:rPr>
-              <a:t>«Yo tengo un papá que es el papá bueno, el papá consentidor, el papá que dice vete suave, vete en paz. Pero no es el que está con ella todos los días. No es el que tiene que regáñarla por las tareas, porque tiene que ir a impulsar los deberes de la casa.»</a:t>
+              <a:t>«Mi mamá me enseñó desde pequeña cómo yo tenía que manejarme y guardar mi dinero, pero me enseñó que primero tengo que ganármelo. Me mandaba a vender conconetes para la calle, y yo era chiquita.»</a:t>
             </a:r>
           </a:p>
         </p:txBody>
@@ -10301,7 +10301,7 @@
                 </a:solidFill>
                 <a:latin typeface="Poppins"/>
               </a:rPr>
-              <a:t>— Familia Monoparental</a:t>
+              <a:t>— Familia Masivo Emprendedoras</a:t>
             </a:r>
           </a:p>
         </p:txBody>
@@ -10711,7 +10711,7 @@
                 </a:solidFill>
                 <a:latin typeface="Instrument Serif"/>
               </a:rPr>
-              <a:t>EL ROL QUE SE LE ATRIBUYE AL HOMBRE LO OCUPA ELLA.</a:t>
+              <a:t>DECIDE SOLA (79.6%) Y HACE LAS TAREAS TAMBIÉN (66% COCINA, LAVA, LIMPIA): AUTONOMÍA Y SOBRECARGA CONVIVEN.</a:t>
             </a:r>
           </a:p>
         </p:txBody>
@@ -10885,7 +10885,7 @@
                 </a:solidFill>
                 <a:latin typeface="Poppins"/>
               </a:rPr>
-              <a:t> de su hogar. [FW — perfil: jóvenes, jefas de hogar, líderes, emprendedoras. No proyectable a población general.]</a:t>
+              <a:t> de su hogar. [FW — perfil: jóvenes, jefas de hogar, líderes, emprendedoras.]</a:t>
             </a:r>
           </a:p>
         </p:txBody>
@@ -10920,7 +10920,7 @@
                 </a:solidFill>
                 <a:latin typeface="Instrument Serif"/>
               </a:rPr>
-              <a:t>68%</a:t>
+              <a:t>80%</a:t>
             </a:r>
           </a:p>
         </p:txBody>
@@ -10955,7 +10955,7 @@
                 </a:solidFill>
                 <a:latin typeface="Poppins"/>
               </a:rPr>
-              <a:t>tiene </a:t>
+              <a:t>rechaza "no las tomo yo, las toma mi esposo" (bottom-2 79.6%). </a:t>
             </a:r>
             <a:r>
               <a:rPr sz="1300" b="1" i="0" kern="0" spc="0">
@@ -10964,7 +10964,7 @@
                 </a:solidFill>
                 <a:latin typeface="Poppins"/>
               </a:rPr>
-              <a:t>trabajo formal</a:t>
+              <a:t>Decide sola o discute</a:t>
             </a:r>
             <a:r>
               <a:rPr sz="1300" b="0" i="0" kern="0" spc="0">
@@ -10973,7 +10973,7 @@
                 </a:solidFill>
                 <a:latin typeface="Poppins"/>
               </a:rPr>
-              <a:t>; 13.9% informal o emprendimiento; solo 4.2% se declara ama de casa. La mujer del estudio FW está mayoritariamente vinculada al ingreso.</a:t>
+              <a:t> — pero no le entrega la decisión al hombre.</a:t>
             </a:r>
           </a:p>
         </p:txBody>
@@ -11008,7 +11008,7 @@
                 </a:solidFill>
                 <a:latin typeface="Instrument Serif"/>
               </a:rPr>
-              <a:t>43%</a:t>
+              <a:t>66%</a:t>
             </a:r>
           </a:p>
         </p:txBody>
@@ -11043,7 +11043,7 @@
                 </a:solidFill>
                 <a:latin typeface="Poppins"/>
               </a:rPr>
-              <a:t>"</a:t>
+              <a:t>hace cocina, lavado y limpieza "</a:t>
             </a:r>
             <a:r>
               <a:rPr sz="1300" b="1" i="0" kern="0" spc="0">
@@ -11052,7 +11052,7 @@
                 </a:solidFill>
                 <a:latin typeface="Poppins"/>
               </a:rPr>
-              <a:t>Las tomo yo sola</a:t>
+              <a:t>más la mujer</a:t>
             </a:r>
             <a:r>
               <a:rPr sz="1300" b="0" i="0" kern="0" spc="0">
@@ -11061,7 +11061,7 @@
                 </a:solidFill>
                 <a:latin typeface="Poppins"/>
               </a:rPr>
-              <a:t>" es la frase con mayor acuerdo top-2 en decisiones financieras (42.5%, μ=3.01). "No las tomo yo, lo hace mi esposo" tiene el mayor desacuerdo (bottom-2 79.6%).</a:t>
+              <a:t>" (CC, Q056). La autonomía decisional no liberó el reparto material — agregó la decisión al trabajo doméstico.</a:t>
             </a:r>
           </a:p>
         </p:txBody>
